--- a/content/Lectures/Semester 1/Week 04 - Mathematical Programming - Modelling/1 Lecture/Slack Variables.pptx
+++ b/content/Lectures/Semester 1/Week 04 - Mathematical Programming - Modelling/1 Lecture/Slack Variables.pptx
@@ -4186,7 +4186,7 @@
                               </a:solidFill>
                               <a:latin typeface="Cambria Math" panose="02040503050406030204" pitchFamily="18" charset="0"/>
                             </a:rPr>
-                            <m:t>𝑠</m:t>
+                            <m:t>𝑒</m:t>
                           </m:r>
                         </m:e>
                         <m:sub>
